--- a/data/data_analysis/CAGR_plots.pptx
+++ b/data/data_analysis/CAGR_plots.pptx
@@ -270,7 +270,7 @@
           <a:p>
             <a:fld id="{25C820A4-0B52-43A8-957A-6471D3E9C03A}" type="datetimeFigureOut">
               <a:rPr lang="en-US" smtClean="0"/>
-              <a:t>7/15/2026</a:t>
+              <a:t>9/17/2026</a:t>
             </a:fld>
             <a:endParaRPr lang="en-US"/>
           </a:p>
@@ -468,7 +468,7 @@
           <a:p>
             <a:fld id="{25C820A4-0B52-43A8-957A-6471D3E9C03A}" type="datetimeFigureOut">
               <a:rPr lang="en-US" smtClean="0"/>
-              <a:t>7/15/2026</a:t>
+              <a:t>9/17/2026</a:t>
             </a:fld>
             <a:endParaRPr lang="en-US"/>
           </a:p>
@@ -676,7 +676,7 @@
           <a:p>
             <a:fld id="{25C820A4-0B52-43A8-957A-6471D3E9C03A}" type="datetimeFigureOut">
               <a:rPr lang="en-US" smtClean="0"/>
-              <a:t>7/15/2026</a:t>
+              <a:t>9/17/2026</a:t>
             </a:fld>
             <a:endParaRPr lang="en-US"/>
           </a:p>
@@ -874,7 +874,7 @@
           <a:p>
             <a:fld id="{25C820A4-0B52-43A8-957A-6471D3E9C03A}" type="datetimeFigureOut">
               <a:rPr lang="en-US" smtClean="0"/>
-              <a:t>7/15/2026</a:t>
+              <a:t>9/17/2026</a:t>
             </a:fld>
             <a:endParaRPr lang="en-US"/>
           </a:p>
@@ -1149,7 +1149,7 @@
           <a:p>
             <a:fld id="{25C820A4-0B52-43A8-957A-6471D3E9C03A}" type="datetimeFigureOut">
               <a:rPr lang="en-US" smtClean="0"/>
-              <a:t>7/15/2026</a:t>
+              <a:t>9/17/2026</a:t>
             </a:fld>
             <a:endParaRPr lang="en-US"/>
           </a:p>
@@ -1414,7 +1414,7 @@
           <a:p>
             <a:fld id="{25C820A4-0B52-43A8-957A-6471D3E9C03A}" type="datetimeFigureOut">
               <a:rPr lang="en-US" smtClean="0"/>
-              <a:t>7/15/2026</a:t>
+              <a:t>9/17/2026</a:t>
             </a:fld>
             <a:endParaRPr lang="en-US"/>
           </a:p>
@@ -1826,7 +1826,7 @@
           <a:p>
             <a:fld id="{25C820A4-0B52-43A8-957A-6471D3E9C03A}" type="datetimeFigureOut">
               <a:rPr lang="en-US" smtClean="0"/>
-              <a:t>7/15/2026</a:t>
+              <a:t>9/17/2026</a:t>
             </a:fld>
             <a:endParaRPr lang="en-US"/>
           </a:p>
@@ -1967,7 +1967,7 @@
           <a:p>
             <a:fld id="{25C820A4-0B52-43A8-957A-6471D3E9C03A}" type="datetimeFigureOut">
               <a:rPr lang="en-US" smtClean="0"/>
-              <a:t>7/15/2026</a:t>
+              <a:t>9/17/2026</a:t>
             </a:fld>
             <a:endParaRPr lang="en-US"/>
           </a:p>
@@ -2080,7 +2080,7 @@
           <a:p>
             <a:fld id="{25C820A4-0B52-43A8-957A-6471D3E9C03A}" type="datetimeFigureOut">
               <a:rPr lang="en-US" smtClean="0"/>
-              <a:t>7/15/2026</a:t>
+              <a:t>9/17/2026</a:t>
             </a:fld>
             <a:endParaRPr lang="en-US"/>
           </a:p>
@@ -2391,7 +2391,7 @@
           <a:p>
             <a:fld id="{25C820A4-0B52-43A8-957A-6471D3E9C03A}" type="datetimeFigureOut">
               <a:rPr lang="en-US" smtClean="0"/>
-              <a:t>7/15/2026</a:t>
+              <a:t>9/17/2026</a:t>
             </a:fld>
             <a:endParaRPr lang="en-US"/>
           </a:p>
@@ -2679,7 +2679,7 @@
           <a:p>
             <a:fld id="{25C820A4-0B52-43A8-957A-6471D3E9C03A}" type="datetimeFigureOut">
               <a:rPr lang="en-US" smtClean="0"/>
-              <a:t>7/15/2026</a:t>
+              <a:t>9/17/2026</a:t>
             </a:fld>
             <a:endParaRPr lang="en-US"/>
           </a:p>
@@ -2920,7 +2920,7 @@
           <a:p>
             <a:fld id="{25C820A4-0B52-43A8-957A-6471D3E9C03A}" type="datetimeFigureOut">
               <a:rPr lang="en-US" smtClean="0"/>
-              <a:t>7/15/2026</a:t>
+              <a:t>9/17/2026</a:t>
             </a:fld>
             <a:endParaRPr lang="en-US"/>
           </a:p>
@@ -4669,10 +4669,10 @@
       </p:grpSpPr>
       <p:pic>
         <p:nvPicPr>
-          <p:cNvPr id="7" name="Picture 6">
-            <a:extLst>
-              <a:ext uri="{FF2B5EF4-FFF2-40B4-BE49-F238E27FC236}">
-                <a16:creationId xmlns:a16="http://schemas.microsoft.com/office/drawing/2014/main" id="{8CE3438E-FC38-CB18-6748-6E3EA945584F}"/>
+          <p:cNvPr id="12" name="Picture 11">
+            <a:extLst>
+              <a:ext uri="{FF2B5EF4-FFF2-40B4-BE49-F238E27FC236}">
+                <a16:creationId xmlns:a16="http://schemas.microsoft.com/office/drawing/2014/main" id="{BEAF7B41-2AF8-ED15-2D54-B0208B0A2863}"/>
               </a:ext>
             </a:extLst>
           </p:cNvPr>
@@ -4689,8 +4689,8 @@
         </p:blipFill>
         <p:spPr>
           <a:xfrm>
-            <a:off x="-6090" y="2510069"/>
-            <a:ext cx="8540929" cy="3892383"/>
+            <a:off x="0" y="6410691"/>
+            <a:ext cx="8534839" cy="2619388"/>
           </a:xfrm>
           <a:prstGeom prst="rect">
             <a:avLst/>
@@ -4699,10 +4699,10 @@
       </p:pic>
       <p:pic>
         <p:nvPicPr>
-          <p:cNvPr id="14" name="Picture 13">
-            <a:extLst>
-              <a:ext uri="{FF2B5EF4-FFF2-40B4-BE49-F238E27FC236}">
-                <a16:creationId xmlns:a16="http://schemas.microsoft.com/office/drawing/2014/main" id="{0F6934BA-EC05-928F-0A44-0816A91E98D4}"/>
+          <p:cNvPr id="7" name="Picture 6">
+            <a:extLst>
+              <a:ext uri="{FF2B5EF4-FFF2-40B4-BE49-F238E27FC236}">
+                <a16:creationId xmlns:a16="http://schemas.microsoft.com/office/drawing/2014/main" id="{8CE3438E-FC38-CB18-6748-6E3EA945584F}"/>
               </a:ext>
             </a:extLst>
           </p:cNvPr>
@@ -4712,7 +4712,37 @@
           <p:nvPr/>
         </p:nvPicPr>
         <p:blipFill>
-          <a:blip r:embed="rId3">
+          <a:blip r:embed="rId3"/>
+          <a:stretch>
+            <a:fillRect/>
+          </a:stretch>
+        </p:blipFill>
+        <p:spPr>
+          <a:xfrm>
+            <a:off x="-6090" y="2510069"/>
+            <a:ext cx="8540929" cy="3892383"/>
+          </a:xfrm>
+          <a:prstGeom prst="rect">
+            <a:avLst/>
+          </a:prstGeom>
+        </p:spPr>
+      </p:pic>
+      <p:pic>
+        <p:nvPicPr>
+          <p:cNvPr id="14" name="Picture 13">
+            <a:extLst>
+              <a:ext uri="{FF2B5EF4-FFF2-40B4-BE49-F238E27FC236}">
+                <a16:creationId xmlns:a16="http://schemas.microsoft.com/office/drawing/2014/main" id="{0F6934BA-EC05-928F-0A44-0816A91E98D4}"/>
+              </a:ext>
+            </a:extLst>
+          </p:cNvPr>
+          <p:cNvPicPr>
+            <a:picLocks noChangeAspect="1"/>
+          </p:cNvPicPr>
+          <p:nvPr/>
+        </p:nvPicPr>
+        <p:blipFill>
+          <a:blip r:embed="rId4">
             <a:extLst>
               <a:ext uri="{28A0092B-C50C-407E-A947-70E740481C1C}">
                 <a14:useLocalDpi xmlns:a14="http://schemas.microsoft.com/office/drawing/2010/main" val="0"/>
@@ -4750,7 +4780,7 @@
           <p:nvPr/>
         </p:nvPicPr>
         <p:blipFill>
-          <a:blip r:embed="rId4"/>
+          <a:blip r:embed="rId5"/>
           <a:stretch>
             <a:fillRect/>
           </a:stretch>
@@ -4866,6 +4896,76 @@
             <a:r>
               <a:rPr lang="en-US" sz="1200" b="1" dirty="0"/>
               <a:t>c)</a:t>
+            </a:r>
+          </a:p>
+        </p:txBody>
+      </p:sp>
+      <p:sp>
+        <p:nvSpPr>
+          <p:cNvPr id="5" name="TextBox 4">
+            <a:extLst>
+              <a:ext uri="{FF2B5EF4-FFF2-40B4-BE49-F238E27FC236}">
+                <a16:creationId xmlns:a16="http://schemas.microsoft.com/office/drawing/2014/main" id="{2FD1E74A-6C0B-C870-CAD8-4A9C9C72E41C}"/>
+              </a:ext>
+            </a:extLst>
+          </p:cNvPr>
+          <p:cNvSpPr txBox="1"/>
+          <p:nvPr/>
+        </p:nvSpPr>
+        <p:spPr>
+          <a:xfrm>
+            <a:off x="-45131" y="6280427"/>
+            <a:ext cx="411892" cy="276999"/>
+          </a:xfrm>
+          <a:prstGeom prst="rect">
+            <a:avLst/>
+          </a:prstGeom>
+          <a:noFill/>
+        </p:spPr>
+        <p:txBody>
+          <a:bodyPr wrap="square" rtlCol="0">
+            <a:spAutoFit/>
+          </a:bodyPr>
+          <a:lstStyle/>
+          <a:p>
+            <a:r>
+              <a:rPr lang="en-US" sz="1200" b="1" dirty="0"/>
+              <a:t>d)</a:t>
+            </a:r>
+          </a:p>
+        </p:txBody>
+      </p:sp>
+      <p:sp>
+        <p:nvSpPr>
+          <p:cNvPr id="8" name="TextBox 7">
+            <a:extLst>
+              <a:ext uri="{FF2B5EF4-FFF2-40B4-BE49-F238E27FC236}">
+                <a16:creationId xmlns:a16="http://schemas.microsoft.com/office/drawing/2014/main" id="{84716399-7FA6-02F3-E901-27739DA3695E}"/>
+              </a:ext>
+            </a:extLst>
+          </p:cNvPr>
+          <p:cNvSpPr txBox="1"/>
+          <p:nvPr/>
+        </p:nvSpPr>
+        <p:spPr>
+          <a:xfrm>
+            <a:off x="-67697" y="7614550"/>
+            <a:ext cx="411892" cy="276999"/>
+          </a:xfrm>
+          <a:prstGeom prst="rect">
+            <a:avLst/>
+          </a:prstGeom>
+          <a:noFill/>
+        </p:spPr>
+        <p:txBody>
+          <a:bodyPr wrap="square" rtlCol="0">
+            <a:spAutoFit/>
+          </a:bodyPr>
+          <a:lstStyle/>
+          <a:p>
+            <a:r>
+              <a:rPr lang="en-US" sz="1200" b="1" dirty="0"/>
+              <a:t>e)</a:t>
             </a:r>
           </a:p>
         </p:txBody>

--- a/data/data_analysis/CAGR_plots.pptx
+++ b/data/data_analysis/CAGR_plots.pptx
@@ -270,7 +270,7 @@
           <a:p>
             <a:fld id="{25C820A4-0B52-43A8-957A-6471D3E9C03A}" type="datetimeFigureOut">
               <a:rPr lang="en-US" smtClean="0"/>
-              <a:t>9/17/2026</a:t>
+              <a:t>9/21/2026</a:t>
             </a:fld>
             <a:endParaRPr lang="en-US"/>
           </a:p>
@@ -468,7 +468,7 @@
           <a:p>
             <a:fld id="{25C820A4-0B52-43A8-957A-6471D3E9C03A}" type="datetimeFigureOut">
               <a:rPr lang="en-US" smtClean="0"/>
-              <a:t>9/17/2026</a:t>
+              <a:t>9/21/2026</a:t>
             </a:fld>
             <a:endParaRPr lang="en-US"/>
           </a:p>
@@ -676,7 +676,7 @@
           <a:p>
             <a:fld id="{25C820A4-0B52-43A8-957A-6471D3E9C03A}" type="datetimeFigureOut">
               <a:rPr lang="en-US" smtClean="0"/>
-              <a:t>9/17/2026</a:t>
+              <a:t>9/21/2026</a:t>
             </a:fld>
             <a:endParaRPr lang="en-US"/>
           </a:p>
@@ -874,7 +874,7 @@
           <a:p>
             <a:fld id="{25C820A4-0B52-43A8-957A-6471D3E9C03A}" type="datetimeFigureOut">
               <a:rPr lang="en-US" smtClean="0"/>
-              <a:t>9/17/2026</a:t>
+              <a:t>9/21/2026</a:t>
             </a:fld>
             <a:endParaRPr lang="en-US"/>
           </a:p>
@@ -1149,7 +1149,7 @@
           <a:p>
             <a:fld id="{25C820A4-0B52-43A8-957A-6471D3E9C03A}" type="datetimeFigureOut">
               <a:rPr lang="en-US" smtClean="0"/>
-              <a:t>9/17/2026</a:t>
+              <a:t>9/21/2026</a:t>
             </a:fld>
             <a:endParaRPr lang="en-US"/>
           </a:p>
@@ -1414,7 +1414,7 @@
           <a:p>
             <a:fld id="{25C820A4-0B52-43A8-957A-6471D3E9C03A}" type="datetimeFigureOut">
               <a:rPr lang="en-US" smtClean="0"/>
-              <a:t>9/17/2026</a:t>
+              <a:t>9/21/2026</a:t>
             </a:fld>
             <a:endParaRPr lang="en-US"/>
           </a:p>
@@ -1826,7 +1826,7 @@
           <a:p>
             <a:fld id="{25C820A4-0B52-43A8-957A-6471D3E9C03A}" type="datetimeFigureOut">
               <a:rPr lang="en-US" smtClean="0"/>
-              <a:t>9/17/2026</a:t>
+              <a:t>9/21/2026</a:t>
             </a:fld>
             <a:endParaRPr lang="en-US"/>
           </a:p>
@@ -1967,7 +1967,7 @@
           <a:p>
             <a:fld id="{25C820A4-0B52-43A8-957A-6471D3E9C03A}" type="datetimeFigureOut">
               <a:rPr lang="en-US" smtClean="0"/>
-              <a:t>9/17/2026</a:t>
+              <a:t>9/21/2026</a:t>
             </a:fld>
             <a:endParaRPr lang="en-US"/>
           </a:p>
@@ -2080,7 +2080,7 @@
           <a:p>
             <a:fld id="{25C820A4-0B52-43A8-957A-6471D3E9C03A}" type="datetimeFigureOut">
               <a:rPr lang="en-US" smtClean="0"/>
-              <a:t>9/17/2026</a:t>
+              <a:t>9/21/2026</a:t>
             </a:fld>
             <a:endParaRPr lang="en-US"/>
           </a:p>
@@ -2391,7 +2391,7 @@
           <a:p>
             <a:fld id="{25C820A4-0B52-43A8-957A-6471D3E9C03A}" type="datetimeFigureOut">
               <a:rPr lang="en-US" smtClean="0"/>
-              <a:t>9/17/2026</a:t>
+              <a:t>9/21/2026</a:t>
             </a:fld>
             <a:endParaRPr lang="en-US"/>
           </a:p>
@@ -2679,7 +2679,7 @@
           <a:p>
             <a:fld id="{25C820A4-0B52-43A8-957A-6471D3E9C03A}" type="datetimeFigureOut">
               <a:rPr lang="en-US" smtClean="0"/>
-              <a:t>9/17/2026</a:t>
+              <a:t>9/21/2026</a:t>
             </a:fld>
             <a:endParaRPr lang="en-US"/>
           </a:p>
@@ -2920,7 +2920,7 @@
           <a:p>
             <a:fld id="{25C820A4-0B52-43A8-957A-6471D3E9C03A}" type="datetimeFigureOut">
               <a:rPr lang="en-US" smtClean="0"/>
-              <a:t>9/17/2026</a:t>
+              <a:t>9/21/2026</a:t>
             </a:fld>
             <a:endParaRPr lang="en-US"/>
           </a:p>
@@ -5002,10 +5002,10 @@
       </p:grpSpPr>
       <p:pic>
         <p:nvPicPr>
-          <p:cNvPr id="5" name="Picture 4">
-            <a:extLst>
-              <a:ext uri="{FF2B5EF4-FFF2-40B4-BE49-F238E27FC236}">
-                <a16:creationId xmlns:a16="http://schemas.microsoft.com/office/drawing/2014/main" id="{A8184DE6-7F49-D476-749D-50D2E8E67BF4}"/>
+          <p:cNvPr id="6" name="Picture 5">
+            <a:extLst>
+              <a:ext uri="{FF2B5EF4-FFF2-40B4-BE49-F238E27FC236}">
+                <a16:creationId xmlns:a16="http://schemas.microsoft.com/office/drawing/2014/main" id="{017C7894-B42C-4EFC-DB7E-66C4FE98ACD5}"/>
               </a:ext>
             </a:extLst>
           </p:cNvPr>
@@ -5016,14 +5016,15 @@
         </p:nvPicPr>
         <p:blipFill>
           <a:blip r:embed="rId2"/>
+          <a:srcRect t="2538" b="1"/>
           <a:stretch>
             <a:fillRect/>
           </a:stretch>
         </p:blipFill>
         <p:spPr>
           <a:xfrm>
-            <a:off x="0" y="0"/>
-            <a:ext cx="6985686" cy="1974434"/>
+            <a:off x="0" y="2062149"/>
+            <a:ext cx="7224584" cy="1547350"/>
           </a:xfrm>
           <a:prstGeom prst="rect">
             <a:avLst/>
@@ -5032,10 +5033,10 @@
       </p:pic>
       <p:pic>
         <p:nvPicPr>
-          <p:cNvPr id="9" name="Picture 8">
-            <a:extLst>
-              <a:ext uri="{FF2B5EF4-FFF2-40B4-BE49-F238E27FC236}">
-                <a16:creationId xmlns:a16="http://schemas.microsoft.com/office/drawing/2014/main" id="{BFE9C71C-9825-DB4E-8868-7A4CBD4B5831}"/>
+          <p:cNvPr id="8" name="Picture 7">
+            <a:extLst>
+              <a:ext uri="{FF2B5EF4-FFF2-40B4-BE49-F238E27FC236}">
+                <a16:creationId xmlns:a16="http://schemas.microsoft.com/office/drawing/2014/main" id="{AD303A1A-2B69-3B50-4D85-006C452A4FEF}"/>
               </a:ext>
             </a:extLst>
           </p:cNvPr>
@@ -5046,15 +5047,14 @@
         </p:nvPicPr>
         <p:blipFill>
           <a:blip r:embed="rId3"/>
-          <a:srcRect t="546"/>
           <a:stretch>
             <a:fillRect/>
           </a:stretch>
         </p:blipFill>
         <p:spPr>
           <a:xfrm>
-            <a:off x="0" y="1974474"/>
-            <a:ext cx="6985686" cy="1501222"/>
+            <a:off x="0" y="3637534"/>
+            <a:ext cx="7224584" cy="1592209"/>
           </a:xfrm>
           <a:prstGeom prst="rect">
             <a:avLst/>
@@ -5063,10 +5063,10 @@
       </p:pic>
       <p:pic>
         <p:nvPicPr>
-          <p:cNvPr id="11" name="Picture 10">
-            <a:extLst>
-              <a:ext uri="{FF2B5EF4-FFF2-40B4-BE49-F238E27FC236}">
-                <a16:creationId xmlns:a16="http://schemas.microsoft.com/office/drawing/2014/main" id="{3CB35475-8EA3-5829-7DA5-66975387840F}"/>
+          <p:cNvPr id="12" name="Picture 11">
+            <a:extLst>
+              <a:ext uri="{FF2B5EF4-FFF2-40B4-BE49-F238E27FC236}">
+                <a16:creationId xmlns:a16="http://schemas.microsoft.com/office/drawing/2014/main" id="{F6C123E6-EEFC-56FD-B295-7AFEC4E46561}"/>
               </a:ext>
             </a:extLst>
           </p:cNvPr>
@@ -5077,15 +5077,14 @@
         </p:nvPicPr>
         <p:blipFill>
           <a:blip r:embed="rId4"/>
-          <a:srcRect t="-337"/>
           <a:stretch>
             <a:fillRect/>
           </a:stretch>
         </p:blipFill>
         <p:spPr>
           <a:xfrm>
-            <a:off x="0" y="3483864"/>
-            <a:ext cx="6985686" cy="1506286"/>
+            <a:off x="0" y="5257778"/>
+            <a:ext cx="7224584" cy="1543316"/>
           </a:xfrm>
           <a:prstGeom prst="rect">
             <a:avLst/>
@@ -5094,10 +5093,10 @@
       </p:pic>
       <p:pic>
         <p:nvPicPr>
-          <p:cNvPr id="13" name="Picture 12">
-            <a:extLst>
-              <a:ext uri="{FF2B5EF4-FFF2-40B4-BE49-F238E27FC236}">
-                <a16:creationId xmlns:a16="http://schemas.microsoft.com/office/drawing/2014/main" id="{33AA247F-344F-AEAF-F736-5A9B339DB0C4}"/>
+          <p:cNvPr id="3" name="Picture 2">
+            <a:extLst>
+              <a:ext uri="{FF2B5EF4-FFF2-40B4-BE49-F238E27FC236}">
+                <a16:creationId xmlns:a16="http://schemas.microsoft.com/office/drawing/2014/main" id="{D9EB31D0-3A53-8708-36F3-02C6CE1DF196}"/>
               </a:ext>
             </a:extLst>
           </p:cNvPr>
@@ -5114,45 +5113,14 @@
         </p:blipFill>
         <p:spPr>
           <a:xfrm>
-            <a:off x="0" y="4985126"/>
-            <a:ext cx="6985686" cy="1481206"/>
+            <a:off x="0" y="-4916"/>
+            <a:ext cx="7224584" cy="2039030"/>
           </a:xfrm>
           <a:prstGeom prst="rect">
             <a:avLst/>
           </a:prstGeom>
         </p:spPr>
       </p:pic>
-      <p:pic>
-        <p:nvPicPr>
-          <p:cNvPr id="17" name="Picture 16">
-            <a:extLst>
-              <a:ext uri="{FF2B5EF4-FFF2-40B4-BE49-F238E27FC236}">
-                <a16:creationId xmlns:a16="http://schemas.microsoft.com/office/drawing/2014/main" id="{21DDDF53-6F77-5A90-B7E1-D708D77B70E5}"/>
-              </a:ext>
-            </a:extLst>
-          </p:cNvPr>
-          <p:cNvPicPr>
-            <a:picLocks noChangeAspect="1"/>
-          </p:cNvPicPr>
-          <p:nvPr/>
-        </p:nvPicPr>
-        <p:blipFill>
-          <a:blip r:embed="rId2"/>
-          <a:srcRect l="67862" r="31483"/>
-          <a:stretch>
-            <a:fillRect/>
-          </a:stretch>
-        </p:blipFill>
-        <p:spPr>
-          <a:xfrm>
-            <a:off x="6939967" y="0"/>
-            <a:ext cx="45719" cy="1974434"/>
-          </a:xfrm>
-          <a:prstGeom prst="rect">
-            <a:avLst/>
-          </a:prstGeom>
-        </p:spPr>
-      </p:pic>
       <p:sp>
         <p:nvSpPr>
           <p:cNvPr id="19" name="TextBox 18">
@@ -5167,7 +5135,7 @@
         </p:nvSpPr>
         <p:spPr>
           <a:xfrm>
-            <a:off x="-64763" y="359792"/>
+            <a:off x="-64763" y="411068"/>
             <a:ext cx="411892" cy="276999"/>
           </a:xfrm>
           <a:prstGeom prst="rect">
@@ -5202,7 +5170,7 @@
         </p:nvSpPr>
         <p:spPr>
           <a:xfrm>
-            <a:off x="-64763" y="1861054"/>
+            <a:off x="-64763" y="1980698"/>
             <a:ext cx="411892" cy="276999"/>
           </a:xfrm>
           <a:prstGeom prst="rect">
@@ -5237,7 +5205,7 @@
         </p:nvSpPr>
         <p:spPr>
           <a:xfrm>
-            <a:off x="-64763" y="3414922"/>
+            <a:off x="-64763" y="3594385"/>
             <a:ext cx="411892" cy="276999"/>
           </a:xfrm>
           <a:prstGeom prst="rect">
@@ -5272,7 +5240,7 @@
         </p:nvSpPr>
         <p:spPr>
           <a:xfrm>
-            <a:off x="-64763" y="4924352"/>
+            <a:off x="-64763" y="5163633"/>
             <a:ext cx="411892" cy="276999"/>
           </a:xfrm>
           <a:prstGeom prst="rect">
